--- a/examples/enpre.pptx
+++ b/examples/enpre.pptx
@@ -20,7 +20,6 @@
     <p:sldId id="268" r:id="rId14"/>
     <p:sldId id="269" r:id="rId15"/>
     <p:sldId id="270" r:id="rId16"/>
-    <p:sldId id="271" r:id="rId17"/>
   </p:sldIdLst>
   <p:sldSz cx="9144000" cy="5143500" type="screen16x9"/>
   <p:notesSz cx="6858000" cy="9144000"/>
@@ -6132,78 +6131,6 @@
             </a:pPr>
             <a:r>
               <a:rPr/>
-              <a:t>Tables</a:t>
-            </a:r>
-          </a:p>
-        </p:txBody>
-      </p:sp>
-      <p:sp>
-        <p:nvSpPr>
-          <p:cNvPr id="3" name="Content Placeholder 2"/>
-          <p:cNvSpPr>
-            <a:spLocks noGrp="1"/>
-          </p:cNvSpPr>
-          <p:nvPr>
-            <p:ph idx="1"/>
-          </p:nvPr>
-        </p:nvSpPr>
-        <p:spPr/>
-        <p:txBody>
-          <a:bodyPr/>
-          <a:lstStyle/>
-          <a:p>
-            <a:pPr lvl="0" indent="0" marL="0">
-              <a:buNone/>
-            </a:pPr>
-            <a:r>
-              <a:rPr/>
-              <a:t>Referable Table 1 (a).</a:t>
-            </a:r>
-          </a:p>
-        </p:txBody>
-      </p:sp>
-    </p:spTree>
-  </p:cSld>
-</p:sld>
-</file>
-
-<file path=ppt/slides/slide11.xml><?xml version="1.0" encoding="utf-8"?>
-<p:sld xmlns:a="http://schemas.openxmlformats.org/drawingml/2006/main" xmlns:r="http://schemas.openxmlformats.org/officeDocument/2006/relationships" xmlns:p="http://schemas.openxmlformats.org/presentationml/2006/main">
-  <p:cSld>
-    <p:spTree>
-      <p:nvGrpSpPr>
-        <p:cNvPr id="1" name=""/>
-        <p:cNvGrpSpPr/>
-        <p:nvPr/>
-      </p:nvGrpSpPr>
-      <p:grpSpPr>
-        <a:xfrm>
-          <a:off x="0" y="0"/>
-          <a:ext cx="0" cy="0"/>
-          <a:chOff x="0" y="0"/>
-          <a:chExt cx="0" cy="0"/>
-        </a:xfrm>
-      </p:grpSpPr>
-      <p:sp>
-        <p:nvSpPr>
-          <p:cNvPr id="2" name="Title 1"/>
-          <p:cNvSpPr>
-            <a:spLocks noGrp="1"/>
-          </p:cNvSpPr>
-          <p:nvPr>
-            <p:ph type="title"/>
-          </p:nvPr>
-        </p:nvSpPr>
-        <p:spPr/>
-        <p:txBody>
-          <a:bodyPr/>
-          <a:lstStyle/>
-          <a:p>
-            <a:pPr lvl="0" indent="0" marL="0">
-              <a:buNone/>
-            </a:pPr>
-            <a:r>
-              <a:rPr/>
               <a:t>Figures</a:t>
             </a:r>
           </a:p>
@@ -6274,6 +6201,53 @@
 </p:sld>
 </file>
 
+<file path=ppt/slides/slide11.xml><?xml version="1.0" encoding="utf-8"?>
+<p:sld xmlns:a="http://schemas.openxmlformats.org/drawingml/2006/main" xmlns:r="http://schemas.openxmlformats.org/officeDocument/2006/relationships" xmlns:p="http://schemas.openxmlformats.org/presentationml/2006/main">
+  <p:cSld>
+    <p:spTree>
+      <p:nvGrpSpPr>
+        <p:cNvPr id="1" name=""/>
+        <p:cNvGrpSpPr/>
+        <p:nvPr/>
+      </p:nvGrpSpPr>
+      <p:grpSpPr>
+        <a:xfrm>
+          <a:off x="0" y="0"/>
+          <a:ext cx="0" cy="0"/>
+          <a:chOff x="0" y="0"/>
+          <a:chExt cx="0" cy="0"/>
+        </a:xfrm>
+      </p:grpSpPr>
+      <p:sp>
+        <p:nvSpPr>
+          <p:cNvPr id="3" name="Content Placeholder 2"/>
+          <p:cNvSpPr>
+            <a:spLocks noGrp="1"/>
+          </p:cNvSpPr>
+          <p:nvPr>
+            <p:ph idx="1"/>
+          </p:nvPr>
+        </p:nvSpPr>
+        <p:spPr/>
+        <p:txBody>
+          <a:bodyPr/>
+          <a:lstStyle/>
+          <a:p>
+            <a:pPr lvl="0" indent="0" marL="0">
+              <a:buNone/>
+            </a:pPr>
+            <a:r>
+              <a:rPr/>
+              <a:t>Referable Figure 1.</a:t>
+            </a:r>
+          </a:p>
+        </p:txBody>
+      </p:sp>
+    </p:spTree>
+  </p:cSld>
+</p:sld>
+</file>
+
 <file path=ppt/slides/slide12.xml><?xml version="1.0" encoding="utf-8"?>
 <p:sld xmlns:a="http://schemas.openxmlformats.org/drawingml/2006/main" xmlns:r="http://schemas.openxmlformats.org/officeDocument/2006/relationships" xmlns:p="http://schemas.openxmlformats.org/presentationml/2006/main">
   <p:cSld>
@@ -6293,6 +6267,31 @@
       </p:grpSpPr>
       <p:sp>
         <p:nvSpPr>
+          <p:cNvPr id="2" name="Title 1"/>
+          <p:cNvSpPr>
+            <a:spLocks noGrp="1"/>
+          </p:cNvSpPr>
+          <p:nvPr>
+            <p:ph type="title"/>
+          </p:nvPr>
+        </p:nvSpPr>
+        <p:spPr/>
+        <p:txBody>
+          <a:bodyPr/>
+          <a:lstStyle/>
+          <a:p>
+            <a:pPr lvl="0" indent="0" marL="0">
+              <a:buNone/>
+            </a:pPr>
+            <a:r>
+              <a:rPr/>
+              <a:t>Computations</a:t>
+            </a:r>
+          </a:p>
+        </p:txBody>
+      </p:sp>
+      <p:sp>
+        <p:nvSpPr>
           <p:cNvPr id="3" name="Content Placeholder 2"/>
           <p:cNvSpPr>
             <a:spLocks noGrp="1"/>
@@ -6311,7 +6310,26 @@
             </a:pPr>
             <a:r>
               <a:rPr/>
-              <a:t>Referable Figure 1.</a:t>
+              <a:t>Beamer format temporarily disabled due to </a:t>
+            </a:r>
+            <a:r>
+              <a:rPr>
+                <a:hlinkClick r:id="rId2"/>
+              </a:rPr>
+              <a:t>Quarto Issue #13372</a:t>
+            </a:r>
+            <a:r>
+              <a:rPr/>
+              <a:t>.</a:t>
+            </a:r>
+          </a:p>
+          <a:p>
+            <a:pPr lvl="0" indent="0" marL="0">
+              <a:buNone/>
+            </a:pPr>
+            <a:r>
+              <a:rPr/>
+              <a:t>Complex side by side. (Figure 2, Figure 2 (a), Figure 2 (b))</a:t>
             </a:r>
           </a:p>
         </p:txBody>
@@ -6348,7 +6366,12 @@
             <p:ph type="title"/>
           </p:nvPr>
         </p:nvSpPr>
-        <p:spPr/>
+        <p:spPr>
+          <a:xfrm>
+            <a:off x="508001" y="2025651"/>
+            <a:ext cx="6447501" cy="1369936"/>
+          </a:xfrm>
+        </p:spPr>
         <p:txBody>
           <a:bodyPr/>
           <a:lstStyle/>
@@ -6358,32 +6381,7 @@
             </a:pPr>
             <a:r>
               <a:rPr/>
-              <a:t>Computations</a:t>
-            </a:r>
-          </a:p>
-        </p:txBody>
-      </p:sp>
-      <p:sp>
-        <p:nvSpPr>
-          <p:cNvPr id="3" name="Content Placeholder 2"/>
-          <p:cNvSpPr>
-            <a:spLocks noGrp="1"/>
-          </p:cNvSpPr>
-          <p:nvPr>
-            <p:ph idx="1"/>
-          </p:nvPr>
-        </p:nvSpPr>
-        <p:spPr/>
-        <p:txBody>
-          <a:bodyPr/>
-          <a:lstStyle/>
-          <a:p>
-            <a:pPr lvl="0" indent="0" marL="0">
-              <a:buNone/>
-            </a:pPr>
-            <a:r>
-              <a:rPr/>
-              <a:t>Complex side by side. (Figure 2, Figure 2 (a), Figure 2 (b))</a:t>
+              <a:t>Subsection 2</a:t>
             </a:r>
           </a:p>
         </p:txBody>
@@ -6394,58 +6392,6 @@
 </file>
 
 <file path=ppt/slides/slide14.xml><?xml version="1.0" encoding="utf-8"?>
-<p:sld xmlns:a="http://schemas.openxmlformats.org/drawingml/2006/main" xmlns:r="http://schemas.openxmlformats.org/officeDocument/2006/relationships" xmlns:p="http://schemas.openxmlformats.org/presentationml/2006/main">
-  <p:cSld>
-    <p:spTree>
-      <p:nvGrpSpPr>
-        <p:cNvPr id="1" name=""/>
-        <p:cNvGrpSpPr/>
-        <p:nvPr/>
-      </p:nvGrpSpPr>
-      <p:grpSpPr>
-        <a:xfrm>
-          <a:off x="0" y="0"/>
-          <a:ext cx="0" cy="0"/>
-          <a:chOff x="0" y="0"/>
-          <a:chExt cx="0" cy="0"/>
-        </a:xfrm>
-      </p:grpSpPr>
-      <p:sp>
-        <p:nvSpPr>
-          <p:cNvPr id="2" name="Title 1"/>
-          <p:cNvSpPr>
-            <a:spLocks noGrp="1"/>
-          </p:cNvSpPr>
-          <p:nvPr>
-            <p:ph type="title"/>
-          </p:nvPr>
-        </p:nvSpPr>
-        <p:spPr>
-          <a:xfrm>
-            <a:off x="508001" y="2025651"/>
-            <a:ext cx="6447501" cy="1369936"/>
-          </a:xfrm>
-        </p:spPr>
-        <p:txBody>
-          <a:bodyPr/>
-          <a:lstStyle/>
-          <a:p>
-            <a:pPr lvl="0" indent="0" marL="0">
-              <a:buNone/>
-            </a:pPr>
-            <a:r>
-              <a:rPr/>
-              <a:t>Subsection 2</a:t>
-            </a:r>
-          </a:p>
-        </p:txBody>
-      </p:sp>
-    </p:spTree>
-  </p:cSld>
-</p:sld>
-</file>
-
-<file path=ppt/slides/slide15.xml><?xml version="1.0" encoding="utf-8"?>
 <p:sld xmlns:a="http://schemas.openxmlformats.org/drawingml/2006/main" xmlns:r="http://schemas.openxmlformats.org/officeDocument/2006/relationships" xmlns:p="http://schemas.openxmlformats.org/presentationml/2006/main">
   <p:cSld>
     <p:spTree>
@@ -6857,7 +6803,7 @@
 </p:sld>
 </file>
 
-<file path=ppt/slides/slide16.xml><?xml version="1.0" encoding="utf-8"?>
+<file path=ppt/slides/slide15.xml><?xml version="1.0" encoding="utf-8"?>
 <p:sld xmlns:a="http://schemas.openxmlformats.org/drawingml/2006/main" xmlns:r="http://schemas.openxmlformats.org/officeDocument/2006/relationships" xmlns:p="http://schemas.openxmlformats.org/presentationml/2006/main">
   <p:cSld>
     <p:spTree>

--- a/examples/enpre.pptx
+++ b/examples/enpre.pptx
@@ -6170,7 +6170,9 @@
         <p:nvSpPr>
           <p:cNvPr id="1" name="TextBox 3"/>
           <p:cNvSpPr txBox="1"/>
-          <p:nvPr/>
+          <p:nvPr>
+            <p:ph idx="1"/>
+          </p:nvPr>
         </p:nvSpPr>
         <p:spPr>
           <a:xfrm>
@@ -6504,19 +6506,21 @@
                           </m:r>
                         </m:e>
                       </m:nary>
-                      <m:d>
-                        <m:dPr>
-                          <m:begChr m:val="("/>
-                          <m:sepChr m:val=""/>
-                          <m:endChr m:val=")"/>
-                          <m:grow/>
-                        </m:dPr>
-                        <m:e>
-                          <m:r>
-                            <m:t>d</m:t>
-                          </m:r>
-                        </m:e>
-                      </m:d>
+                      <m:r>
+                        <m:rPr>
+                          <m:sty m:val="p"/>
+                        </m:rPr>
+                        <m:t>(</m:t>
+                      </m:r>
+                      <m:r>
+                        <m:t>d</m:t>
+                      </m:r>
+                      <m:r>
+                        <m:rPr>
+                          <m:sty m:val="p"/>
+                        </m:rPr>
+                        <m:t>)</m:t>
+                      </m:r>
                       <m:r>
                         <m:rPr>
                           <m:sty m:val="p"/>
@@ -6585,47 +6589,51 @@
                           </m:r>
                         </m:e>
                       </m:nary>
-                      <m:d>
-                        <m:dPr>
-                          <m:begChr m:val="("/>
-                          <m:sepChr m:val=""/>
-                          <m:endChr m:val=")"/>
-                          <m:grow/>
-                        </m:dPr>
-                        <m:e>
-                          <m:r>
-                            <m:t>d</m:t>
-                          </m:r>
-                        </m:e>
-                      </m:d>
+                      <m:r>
+                        <m:rPr>
+                          <m:sty m:val="p"/>
+                        </m:rPr>
+                        <m:t>(</m:t>
+                      </m:r>
+                      <m:r>
+                        <m:t>d</m:t>
+                      </m:r>
+                      <m:r>
+                        <m:rPr>
+                          <m:sty m:val="p"/>
+                        </m:rPr>
+                        <m:t>)</m:t>
+                      </m:r>
                       <m:r>
                         <m:rPr>
                           <m:sty m:val="p"/>
                         </m:rPr>
                         <m:t>=</m:t>
                       </m:r>
-                      <m:d>
-                        <m:dPr>
-                          <m:begChr m:val="["/>
-                          <m:sepChr m:val=""/>
-                          <m:endChr m:val="]"/>
-                          <m:grow/>
-                        </m:dPr>
-                        <m:e>
-                          <m:r>
-                            <m:t>n</m:t>
-                          </m:r>
-                          <m:r>
-                            <m:rPr>
-                              <m:sty m:val="p"/>
-                            </m:rPr>
-                            <m:t>=</m:t>
-                          </m:r>
-                          <m:r>
-                            <m:t>1</m:t>
-                          </m:r>
-                        </m:e>
-                      </m:d>
+                      <m:r>
+                        <m:rPr>
+                          <m:sty m:val="p"/>
+                        </m:rPr>
+                        <m:t>[</m:t>
+                      </m:r>
+                      <m:r>
+                        <m:t>n</m:t>
+                      </m:r>
+                      <m:r>
+                        <m:rPr>
+                          <m:sty m:val="p"/>
+                        </m:rPr>
+                        <m:t>=</m:t>
+                      </m:r>
+                      <m:r>
+                        <m:t>1</m:t>
+                      </m:r>
+                      <m:r>
+                        <m:rPr>
+                          <m:sty m:val="p"/>
+                        </m:rPr>
+                        <m:t>]</m:t>
+                      </m:r>
                     </m:oMath>
                   </m:oMathPara>
                 </a14:m>

--- a/examples/enpre.pptx
+++ b/examples/enpre.pptx
@@ -6023,7 +6023,7 @@
             </a:pPr>
             <a:r>
               <a:rPr/>
-              <a:t>SunQuarTeX Example - enpre</a:t>
+              <a:t>Presentation Example (English)</a:t>
             </a:r>
           </a:p>
         </p:txBody>
@@ -6053,7 +6053,7 @@
             </a:pPr>
             <a:r>
               <a:rPr/>
-              <a:t>Subtitle Here</a:t>
+              <a:t>SunQuarTeX Examples</a:t>
             </a:r>
             <a:br/>
             <a:br/>
